--- a/doc/개발환경_설치매뉴얼(Vuetify.JS).pptx
+++ b/doc/개발환경_설치매뉴얼(Vuetify.JS).pptx
@@ -113,10 +113,6 @@
           <p14:sldIdLst>
             <p14:sldId id="256"/>
             <p14:sldId id="277"/>
-          </p14:sldIdLst>
-        </p14:section>
-        <p14:section name="제목 없는 구역" id="{53E5FD2C-994F-4CFF-8214-B8896DC0A73D}">
-          <p14:sldIdLst>
             <p14:sldId id="278"/>
           </p14:sldIdLst>
         </p14:section>
@@ -276,7 +272,7 @@
           <a:p>
             <a:fld id="{7359EE32-49FD-4EA7-9011-353EB936649F}" type="datetimeFigureOut">
               <a:rPr lang="ko-KR" altLang="en-US" smtClean="0"/>
-              <a:t>2025-09-06</a:t>
+              <a:t>2025-09-07</a:t>
             </a:fld>
             <a:endParaRPr lang="ko-KR" altLang="en-US"/>
           </a:p>
@@ -474,7 +470,7 @@
           <a:p>
             <a:fld id="{7359EE32-49FD-4EA7-9011-353EB936649F}" type="datetimeFigureOut">
               <a:rPr lang="ko-KR" altLang="en-US" smtClean="0"/>
-              <a:t>2025-09-06</a:t>
+              <a:t>2025-09-07</a:t>
             </a:fld>
             <a:endParaRPr lang="ko-KR" altLang="en-US"/>
           </a:p>
@@ -682,7 +678,7 @@
           <a:p>
             <a:fld id="{7359EE32-49FD-4EA7-9011-353EB936649F}" type="datetimeFigureOut">
               <a:rPr lang="ko-KR" altLang="en-US" smtClean="0"/>
-              <a:t>2025-09-06</a:t>
+              <a:t>2025-09-07</a:t>
             </a:fld>
             <a:endParaRPr lang="ko-KR" altLang="en-US"/>
           </a:p>
@@ -880,7 +876,7 @@
           <a:p>
             <a:fld id="{7359EE32-49FD-4EA7-9011-353EB936649F}" type="datetimeFigureOut">
               <a:rPr lang="ko-KR" altLang="en-US" smtClean="0"/>
-              <a:t>2025-09-06</a:t>
+              <a:t>2025-09-07</a:t>
             </a:fld>
             <a:endParaRPr lang="ko-KR" altLang="en-US"/>
           </a:p>
@@ -1155,7 +1151,7 @@
           <a:p>
             <a:fld id="{7359EE32-49FD-4EA7-9011-353EB936649F}" type="datetimeFigureOut">
               <a:rPr lang="ko-KR" altLang="en-US" smtClean="0"/>
-              <a:t>2025-09-06</a:t>
+              <a:t>2025-09-07</a:t>
             </a:fld>
             <a:endParaRPr lang="ko-KR" altLang="en-US"/>
           </a:p>
@@ -1420,7 +1416,7 @@
           <a:p>
             <a:fld id="{7359EE32-49FD-4EA7-9011-353EB936649F}" type="datetimeFigureOut">
               <a:rPr lang="ko-KR" altLang="en-US" smtClean="0"/>
-              <a:t>2025-09-06</a:t>
+              <a:t>2025-09-07</a:t>
             </a:fld>
             <a:endParaRPr lang="ko-KR" altLang="en-US"/>
           </a:p>
@@ -1832,7 +1828,7 @@
           <a:p>
             <a:fld id="{7359EE32-49FD-4EA7-9011-353EB936649F}" type="datetimeFigureOut">
               <a:rPr lang="ko-KR" altLang="en-US" smtClean="0"/>
-              <a:t>2025-09-06</a:t>
+              <a:t>2025-09-07</a:t>
             </a:fld>
             <a:endParaRPr lang="ko-KR" altLang="en-US"/>
           </a:p>
@@ -1973,7 +1969,7 @@
           <a:p>
             <a:fld id="{7359EE32-49FD-4EA7-9011-353EB936649F}" type="datetimeFigureOut">
               <a:rPr lang="ko-KR" altLang="en-US" smtClean="0"/>
-              <a:t>2025-09-06</a:t>
+              <a:t>2025-09-07</a:t>
             </a:fld>
             <a:endParaRPr lang="ko-KR" altLang="en-US"/>
           </a:p>
@@ -2086,7 +2082,7 @@
           <a:p>
             <a:fld id="{7359EE32-49FD-4EA7-9011-353EB936649F}" type="datetimeFigureOut">
               <a:rPr lang="ko-KR" altLang="en-US" smtClean="0"/>
-              <a:t>2025-09-06</a:t>
+              <a:t>2025-09-07</a:t>
             </a:fld>
             <a:endParaRPr lang="ko-KR" altLang="en-US"/>
           </a:p>
@@ -2397,7 +2393,7 @@
           <a:p>
             <a:fld id="{7359EE32-49FD-4EA7-9011-353EB936649F}" type="datetimeFigureOut">
               <a:rPr lang="ko-KR" altLang="en-US" smtClean="0"/>
-              <a:t>2025-09-06</a:t>
+              <a:t>2025-09-07</a:t>
             </a:fld>
             <a:endParaRPr lang="ko-KR" altLang="en-US"/>
           </a:p>
@@ -2685,7 +2681,7 @@
           <a:p>
             <a:fld id="{7359EE32-49FD-4EA7-9011-353EB936649F}" type="datetimeFigureOut">
               <a:rPr lang="ko-KR" altLang="en-US" smtClean="0"/>
-              <a:t>2025-09-06</a:t>
+              <a:t>2025-09-07</a:t>
             </a:fld>
             <a:endParaRPr lang="ko-KR" altLang="en-US"/>
           </a:p>
@@ -2926,7 +2922,7 @@
           <a:p>
             <a:fld id="{7359EE32-49FD-4EA7-9011-353EB936649F}" type="datetimeFigureOut">
               <a:rPr lang="ko-KR" altLang="en-US" smtClean="0"/>
-              <a:t>2025-09-06</a:t>
+              <a:t>2025-09-07</a:t>
             </a:fld>
             <a:endParaRPr lang="ko-KR" altLang="en-US"/>
           </a:p>
@@ -3474,10 +3470,23 @@
         <p:spPr/>
         <p:txBody>
           <a:bodyPr>
-            <a:normAutofit fontScale="85000" lnSpcReduction="20000"/>
+            <a:normAutofit fontScale="47500" lnSpcReduction="20000"/>
           </a:bodyPr>
           <a:lstStyle/>
           <a:p>
+            <a:pPr marL="0" indent="0">
+              <a:buNone/>
+            </a:pPr>
+            <a:r>
+              <a:rPr lang="ko-KR" altLang="en-US" dirty="0"/>
+              <a:t>설치</a:t>
+            </a:r>
+            <a:endParaRPr lang="en-US" altLang="ko-KR" dirty="0"/>
+          </a:p>
+          <a:p>
+            <a:pPr marL="457200" lvl="1" indent="0">
+              <a:buNone/>
+            </a:pPr>
             <a:r>
               <a:rPr lang="en-US" altLang="ko-KR" dirty="0"/>
               <a:t>$ </a:t>
@@ -3488,10 +3497,18 @@
             </a:r>
             <a:r>
               <a:rPr lang="en-US" altLang="ko-KR" dirty="0"/>
-              <a:t> install –g @vue/cli</a:t>
-            </a:r>
-          </a:p>
-          <a:p>
+              <a:t> install </a:t>
+            </a:r>
+            <a:r>
+              <a:rPr lang="en-US" altLang="ko-KR" dirty="0" err="1"/>
+              <a:t>vuetify</a:t>
+            </a:r>
+            <a:endParaRPr lang="en-US" altLang="ko-KR" dirty="0"/>
+          </a:p>
+          <a:p>
+            <a:pPr marL="457200" lvl="1" indent="0">
+              <a:buNone/>
+            </a:pPr>
             <a:r>
               <a:rPr lang="en-US" altLang="ko-KR" dirty="0"/>
               <a:t>$ </a:t>
@@ -3506,30 +3523,81 @@
             </a:r>
           </a:p>
           <a:p>
+            <a:pPr marL="0" indent="0">
+              <a:buNone/>
+            </a:pPr>
+            <a:endParaRPr lang="en-US" altLang="ko-KR" dirty="0"/>
+          </a:p>
+          <a:p>
+            <a:pPr marL="0" indent="0">
+              <a:buNone/>
+            </a:pPr>
+            <a:r>
+              <a:rPr lang="ko-KR" altLang="en-US" dirty="0"/>
+              <a:t>폰트 검색</a:t>
+            </a:r>
+            <a:endParaRPr lang="en-US" altLang="ko-KR" dirty="0">
+              <a:hlinkClick r:id="rId2"/>
+            </a:endParaRPr>
+          </a:p>
+          <a:p>
+            <a:pPr marL="0" indent="0">
+              <a:buNone/>
+            </a:pPr>
+            <a:r>
+              <a:rPr lang="en-US" altLang="ko-KR" dirty="0">
+                <a:hlinkClick r:id="rId2"/>
+              </a:rPr>
+              <a:t>(Material Design Icons - Icon Library – </a:t>
+            </a:r>
+            <a:r>
+              <a:rPr lang="en-US" altLang="ko-KR" dirty="0" err="1">
+                <a:hlinkClick r:id="rId2"/>
+              </a:rPr>
+              <a:t>Pictogrammers</a:t>
+            </a:r>
+            <a:r>
+              <a:rPr lang="en-US" altLang="ko-KR" dirty="0"/>
+              <a:t>)</a:t>
+            </a:r>
+          </a:p>
+          <a:p>
+            <a:pPr marL="0" indent="0">
+              <a:buNone/>
+            </a:pPr>
             <a:endParaRPr lang="fr-FR" altLang="ko-KR" dirty="0"/>
           </a:p>
           <a:p>
+            <a:pPr marL="0" indent="0">
+              <a:buNone/>
+            </a:pPr>
             <a:r>
               <a:rPr lang="fr-FR" altLang="ko-KR" dirty="0"/>
               <a:t>main.js</a:t>
             </a:r>
           </a:p>
           <a:p>
-            <a:pPr lvl="1"/>
+            <a:pPr marL="0" indent="0">
+              <a:buNone/>
+            </a:pPr>
             <a:r>
               <a:rPr lang="fr-FR" altLang="ko-KR" dirty="0"/>
               <a:t>{</a:t>
             </a:r>
           </a:p>
           <a:p>
-            <a:pPr lvl="2"/>
+            <a:pPr marL="457200" lvl="1" indent="0">
+              <a:buNone/>
+            </a:pPr>
             <a:r>
               <a:rPr lang="fr-FR" altLang="ko-KR" dirty="0"/>
               <a:t>import "@mdi/font/css/materialdesignicons.css";</a:t>
             </a:r>
           </a:p>
           <a:p>
-            <a:pPr lvl="2" fontAlgn="base"/>
+            <a:pPr marL="457200" lvl="1" indent="0" fontAlgn="base">
+              <a:buNone/>
+            </a:pPr>
             <a:r>
               <a:rPr lang="en-US" altLang="ko-KR" dirty="0"/>
               <a:t>import { </a:t>
@@ -3552,11 +3620,15 @@
             </a:r>
           </a:p>
           <a:p>
-            <a:pPr lvl="2" fontAlgn="base"/>
+            <a:pPr marL="457200" lvl="1" indent="0" fontAlgn="base">
+              <a:buNone/>
+            </a:pPr>
             <a:endParaRPr lang="en-US" altLang="ko-KR" dirty="0"/>
           </a:p>
           <a:p>
-            <a:pPr lvl="2" fontAlgn="base"/>
+            <a:pPr marL="457200" lvl="1" indent="0" fontAlgn="base">
+              <a:buNone/>
+            </a:pPr>
             <a:r>
               <a:rPr lang="en-US" altLang="ko-KR" dirty="0"/>
               <a:t>export default </a:t>
@@ -3571,14 +3643,18 @@
             </a:r>
           </a:p>
           <a:p>
-            <a:pPr lvl="2" fontAlgn="base"/>
+            <a:pPr marL="457200" lvl="1" indent="0" fontAlgn="base">
+              <a:buNone/>
+            </a:pPr>
             <a:r>
               <a:rPr lang="en-US" altLang="ko-KR" dirty="0"/>
               <a:t>  icons: {</a:t>
             </a:r>
           </a:p>
           <a:p>
-            <a:pPr lvl="2" fontAlgn="base"/>
+            <a:pPr marL="457200" lvl="1" indent="0" fontAlgn="base">
+              <a:buNone/>
+            </a:pPr>
             <a:r>
               <a:rPr lang="en-US" altLang="ko-KR" dirty="0"/>
               <a:t>    </a:t>
@@ -3593,32 +3669,37 @@
             </a:r>
           </a:p>
           <a:p>
-            <a:pPr lvl="2" fontAlgn="base"/>
+            <a:pPr marL="457200" lvl="1" indent="0" fontAlgn="base">
+              <a:buNone/>
+            </a:pPr>
             <a:r>
               <a:rPr lang="en-US" altLang="ko-KR" dirty="0"/>
               <a:t>  },</a:t>
             </a:r>
           </a:p>
           <a:p>
-            <a:pPr lvl="2" fontAlgn="base"/>
+            <a:pPr marL="457200" lvl="1" indent="0" fontAlgn="base">
+              <a:buNone/>
+            </a:pPr>
             <a:r>
               <a:rPr lang="en-US" altLang="ko-KR" dirty="0"/>
               <a:t>})</a:t>
             </a:r>
           </a:p>
           <a:p>
-            <a:pPr lvl="2"/>
+            <a:pPr marL="457200" lvl="1" indent="0">
+              <a:buNone/>
+            </a:pPr>
             <a:endParaRPr lang="fr-FR" altLang="ko-KR" dirty="0"/>
           </a:p>
           <a:p>
-            <a:pPr lvl="1"/>
+            <a:pPr marL="0" indent="0">
+              <a:buNone/>
+            </a:pPr>
             <a:r>
               <a:rPr lang="fr-FR" altLang="ko-KR" dirty="0"/>
               <a:t>}</a:t>
             </a:r>
-          </a:p>
-          <a:p>
-            <a:endParaRPr lang="fr-FR" altLang="ko-KR" dirty="0"/>
           </a:p>
           <a:p>
             <a:pPr marL="0" indent="0">
@@ -3663,7 +3744,7 @@
           <p:cNvPr id="2" name="제목 1">
             <a:extLst>
               <a:ext uri="{FF2B5EF4-FFF2-40B4-BE49-F238E27FC236}">
-                <a16:creationId xmlns:a16="http://schemas.microsoft.com/office/drawing/2014/main" id="{BC782A63-8C57-65CA-40F5-792C7D37A7CE}"/>
+                <a16:creationId xmlns:a16="http://schemas.microsoft.com/office/drawing/2014/main" id="{5274E6B8-B063-9393-5357-DC1DC00B6506}"/>
               </a:ext>
             </a:extLst>
           </p:cNvPr>
@@ -3679,7 +3760,7 @@
           <a:bodyPr/>
           <a:lstStyle/>
           <a:p>
-            <a:endParaRPr lang="ko-KR" altLang="en-US" dirty="0"/>
+            <a:endParaRPr lang="ko-KR" altLang="en-US"/>
           </a:p>
         </p:txBody>
       </p:sp>
@@ -3688,7 +3769,7 @@
           <p:cNvPr id="3" name="내용 개체 틀 2">
             <a:extLst>
               <a:ext uri="{FF2B5EF4-FFF2-40B4-BE49-F238E27FC236}">
-                <a16:creationId xmlns:a16="http://schemas.microsoft.com/office/drawing/2014/main" id="{6767300C-DBD4-85C5-C111-74583B30262C}"/>
+                <a16:creationId xmlns:a16="http://schemas.microsoft.com/office/drawing/2014/main" id="{C359CCE3-066E-7039-91FF-6B67933D17C5}"/>
               </a:ext>
             </a:extLst>
           </p:cNvPr>
@@ -3699,128 +3780,363 @@
             <p:ph idx="1"/>
           </p:nvPr>
         </p:nvSpPr>
-        <p:spPr>
-          <a:xfrm>
-            <a:off x="838200" y="1825625"/>
-            <a:ext cx="10515600" cy="4351338"/>
-          </a:xfrm>
-        </p:spPr>
-        <p:txBody>
-          <a:bodyPr/>
-          <a:lstStyle/>
-          <a:p>
+        <p:spPr/>
+        <p:txBody>
+          <a:bodyPr>
+            <a:normAutofit fontScale="62500" lnSpcReduction="20000"/>
+          </a:bodyPr>
+          <a:lstStyle/>
+          <a:p>
+            <a:pPr marL="0" indent="0">
+              <a:buNone/>
+            </a:pPr>
             <a:r>
               <a:rPr lang="en-US" altLang="ko-KR" dirty="0"/>
-              <a:t>Material Icon Theme: </a:t>
-            </a:r>
-            <a:r>
-              <a:rPr lang="ko-KR" altLang="en-US" dirty="0"/>
-              <a:t>파일 탐색기에서 파일 아이콘을 추가하여 보기 쉽게 만들어준다</a:t>
-            </a:r>
+              <a:t>main.js</a:t>
+            </a:r>
+          </a:p>
+          <a:p>
+            <a:pPr marL="0" indent="0">
+              <a:buNone/>
+            </a:pPr>
             <a:r>
               <a:rPr lang="en-US" altLang="ko-KR" dirty="0"/>
-              <a:t>.</a:t>
-            </a:r>
-          </a:p>
-          <a:p>
+              <a:t>{</a:t>
+            </a:r>
+          </a:p>
+          <a:p>
+            <a:pPr marL="457200" lvl="1" indent="0">
+              <a:buNone/>
+            </a:pPr>
+            <a:r>
+              <a:rPr lang="en-US" altLang="ko-KR" dirty="0">
+                <a:solidFill>
+                  <a:srgbClr val="0070C0"/>
+                </a:solidFill>
+              </a:rPr>
+              <a:t>// </a:t>
+            </a:r>
+            <a:r>
+              <a:rPr lang="en-US" altLang="ko-KR" dirty="0" err="1">
+                <a:solidFill>
+                  <a:srgbClr val="0070C0"/>
+                </a:solidFill>
+              </a:rPr>
+              <a:t>Vuetify</a:t>
+            </a:r>
+            <a:endParaRPr lang="en-US" altLang="ko-KR" dirty="0">
+              <a:solidFill>
+                <a:srgbClr val="0070C0"/>
+              </a:solidFill>
+            </a:endParaRPr>
+          </a:p>
+          <a:p>
+            <a:pPr marL="457200" lvl="1" indent="0">
+              <a:buNone/>
+            </a:pPr>
+            <a:r>
+              <a:rPr lang="en-US" altLang="ko-KR" dirty="0">
+                <a:solidFill>
+                  <a:srgbClr val="0070C0"/>
+                </a:solidFill>
+              </a:rPr>
+              <a:t>import '</a:t>
+            </a:r>
+            <a:r>
+              <a:rPr lang="en-US" altLang="ko-KR" dirty="0" err="1">
+                <a:solidFill>
+                  <a:srgbClr val="0070C0"/>
+                </a:solidFill>
+              </a:rPr>
+              <a:t>vuetify</a:t>
+            </a:r>
+            <a:r>
+              <a:rPr lang="en-US" altLang="ko-KR" dirty="0">
+                <a:solidFill>
+                  <a:srgbClr val="0070C0"/>
+                </a:solidFill>
+              </a:rPr>
+              <a:t>/styles’</a:t>
+            </a:r>
+            <a:br>
+              <a:rPr lang="en-US" altLang="ko-KR" dirty="0">
+                <a:solidFill>
+                  <a:srgbClr val="0070C0"/>
+                </a:solidFill>
+              </a:rPr>
+            </a:br>
+            <a:r>
+              <a:rPr lang="fr-FR" altLang="ko-KR" dirty="0">
+                <a:solidFill>
+                  <a:srgbClr val="0070C0"/>
+                </a:solidFill>
+              </a:rPr>
+              <a:t>import ‘@mdi/font/css/materialdesignicons.css’</a:t>
+            </a:r>
+            <a:endParaRPr lang="en-US" altLang="ko-KR" dirty="0">
+              <a:solidFill>
+                <a:srgbClr val="0070C0"/>
+              </a:solidFill>
+            </a:endParaRPr>
+          </a:p>
+          <a:p>
+            <a:pPr marL="457200" lvl="1" indent="0">
+              <a:buNone/>
+            </a:pPr>
+            <a:r>
+              <a:rPr lang="en-US" altLang="ko-KR" dirty="0">
+                <a:solidFill>
+                  <a:srgbClr val="0070C0"/>
+                </a:solidFill>
+              </a:rPr>
+              <a:t>import { </a:t>
+            </a:r>
+            <a:r>
+              <a:rPr lang="en-US" altLang="ko-KR" dirty="0" err="1">
+                <a:solidFill>
+                  <a:srgbClr val="0070C0"/>
+                </a:solidFill>
+              </a:rPr>
+              <a:t>createVuetify</a:t>
+            </a:r>
+            <a:r>
+              <a:rPr lang="en-US" altLang="ko-KR" dirty="0">
+                <a:solidFill>
+                  <a:srgbClr val="0070C0"/>
+                </a:solidFill>
+              </a:rPr>
+              <a:t> } from '</a:t>
+            </a:r>
+            <a:r>
+              <a:rPr lang="en-US" altLang="ko-KR" dirty="0" err="1">
+                <a:solidFill>
+                  <a:srgbClr val="0070C0"/>
+                </a:solidFill>
+              </a:rPr>
+              <a:t>vuetify</a:t>
+            </a:r>
+            <a:r>
+              <a:rPr lang="en-US" altLang="ko-KR" dirty="0">
+                <a:solidFill>
+                  <a:srgbClr val="0070C0"/>
+                </a:solidFill>
+              </a:rPr>
+              <a:t>'</a:t>
+            </a:r>
+          </a:p>
+          <a:p>
+            <a:pPr marL="457200" lvl="1" indent="0">
+              <a:buNone/>
+            </a:pPr>
+            <a:r>
+              <a:rPr lang="en-US" altLang="ko-KR" dirty="0">
+                <a:solidFill>
+                  <a:srgbClr val="0070C0"/>
+                </a:solidFill>
+              </a:rPr>
+              <a:t>import * as components from '</a:t>
+            </a:r>
+            <a:r>
+              <a:rPr lang="en-US" altLang="ko-KR" dirty="0" err="1">
+                <a:solidFill>
+                  <a:srgbClr val="0070C0"/>
+                </a:solidFill>
+              </a:rPr>
+              <a:t>vuetify</a:t>
+            </a:r>
+            <a:r>
+              <a:rPr lang="en-US" altLang="ko-KR" dirty="0">
+                <a:solidFill>
+                  <a:srgbClr val="0070C0"/>
+                </a:solidFill>
+              </a:rPr>
+              <a:t>/components'</a:t>
+            </a:r>
+          </a:p>
+          <a:p>
+            <a:pPr marL="457200" lvl="1" indent="0">
+              <a:buNone/>
+            </a:pPr>
+            <a:r>
+              <a:rPr lang="en-US" altLang="ko-KR" dirty="0">
+                <a:solidFill>
+                  <a:srgbClr val="0070C0"/>
+                </a:solidFill>
+              </a:rPr>
+              <a:t>import * as directives from '</a:t>
+            </a:r>
+            <a:r>
+              <a:rPr lang="en-US" altLang="ko-KR" dirty="0" err="1">
+                <a:solidFill>
+                  <a:srgbClr val="0070C0"/>
+                </a:solidFill>
+              </a:rPr>
+              <a:t>vuetify</a:t>
+            </a:r>
+            <a:r>
+              <a:rPr lang="en-US" altLang="ko-KR" dirty="0">
+                <a:solidFill>
+                  <a:srgbClr val="0070C0"/>
+                </a:solidFill>
+              </a:rPr>
+              <a:t>/directives'</a:t>
+            </a:r>
+          </a:p>
+          <a:p>
+            <a:pPr marL="457200" lvl="1" indent="0">
+              <a:buNone/>
+            </a:pPr>
+            <a:br>
+              <a:rPr lang="en-US" altLang="ko-KR" dirty="0">
+                <a:solidFill>
+                  <a:srgbClr val="0070C0"/>
+                </a:solidFill>
+              </a:rPr>
+            </a:br>
+            <a:endParaRPr lang="en-US" altLang="ko-KR" dirty="0">
+              <a:solidFill>
+                <a:srgbClr val="0070C0"/>
+              </a:solidFill>
+            </a:endParaRPr>
+          </a:p>
+          <a:p>
+            <a:pPr marL="457200" lvl="1" indent="0">
+              <a:buNone/>
+            </a:pPr>
+            <a:r>
+              <a:rPr lang="en-US" altLang="ko-KR" dirty="0">
+                <a:solidFill>
+                  <a:srgbClr val="0070C0"/>
+                </a:solidFill>
+              </a:rPr>
+              <a:t>const </a:t>
+            </a:r>
+            <a:r>
+              <a:rPr lang="en-US" altLang="ko-KR" dirty="0" err="1">
+                <a:solidFill>
+                  <a:srgbClr val="0070C0"/>
+                </a:solidFill>
+              </a:rPr>
+              <a:t>vuetify</a:t>
+            </a:r>
+            <a:r>
+              <a:rPr lang="en-US" altLang="ko-KR" dirty="0">
+                <a:solidFill>
+                  <a:srgbClr val="0070C0"/>
+                </a:solidFill>
+              </a:rPr>
+              <a:t> = </a:t>
+            </a:r>
+            <a:r>
+              <a:rPr lang="en-US" altLang="ko-KR" dirty="0" err="1">
+                <a:solidFill>
+                  <a:srgbClr val="0070C0"/>
+                </a:solidFill>
+              </a:rPr>
+              <a:t>createVuetify</a:t>
+            </a:r>
+            <a:r>
+              <a:rPr lang="en-US" altLang="ko-KR" dirty="0">
+                <a:solidFill>
+                  <a:srgbClr val="0070C0"/>
+                </a:solidFill>
+              </a:rPr>
+              <a:t>({</a:t>
+            </a:r>
+          </a:p>
+          <a:p>
+            <a:pPr marL="457200" lvl="1" indent="0">
+              <a:buNone/>
+            </a:pPr>
+            <a:r>
+              <a:rPr lang="en-US" altLang="ko-KR" dirty="0">
+                <a:solidFill>
+                  <a:srgbClr val="0070C0"/>
+                </a:solidFill>
+              </a:rPr>
+              <a:t>    components,</a:t>
+            </a:r>
+          </a:p>
+          <a:p>
+            <a:pPr marL="457200" lvl="1" indent="0">
+              <a:buNone/>
+            </a:pPr>
+            <a:r>
+              <a:rPr lang="en-US" altLang="ko-KR" dirty="0">
+                <a:solidFill>
+                  <a:srgbClr val="0070C0"/>
+                </a:solidFill>
+              </a:rPr>
+              <a:t>    directives,</a:t>
+            </a:r>
+          </a:p>
+          <a:p>
+            <a:pPr marL="457200" lvl="1" indent="0">
+              <a:buNone/>
+            </a:pPr>
+            <a:r>
+              <a:rPr lang="en-US" altLang="ko-KR" dirty="0">
+                <a:solidFill>
+                  <a:srgbClr val="0070C0"/>
+                </a:solidFill>
+              </a:rPr>
+              <a:t>})</a:t>
+            </a:r>
+          </a:p>
+          <a:p>
+            <a:pPr marL="0" indent="0">
+              <a:buNone/>
+            </a:pPr>
+            <a:endParaRPr lang="en-US" altLang="ko-KR" dirty="0"/>
+          </a:p>
+          <a:p>
+            <a:pPr marL="457200" lvl="1" indent="0">
+              <a:buNone/>
+            </a:pPr>
             <a:r>
               <a:rPr lang="en-US" altLang="ko-KR" dirty="0" err="1"/>
-              <a:t>ESLint</a:t>
+              <a:t>createApp</a:t>
             </a:r>
             <a:r>
               <a:rPr lang="en-US" altLang="ko-KR" dirty="0"/>
-              <a:t> : </a:t>
-            </a:r>
-            <a:r>
-              <a:rPr lang="ko-KR" altLang="en-US" dirty="0"/>
-              <a:t>코드 검사기로써 에러가 있는지 검사해주는 도구</a:t>
-            </a:r>
-            <a:endParaRPr lang="en-US" altLang="ko-KR" dirty="0"/>
-          </a:p>
-          <a:p>
+              <a:t>(App).</a:t>
+            </a:r>
+            <a:r>
+              <a:rPr lang="en-US" altLang="ko-KR" dirty="0">
+                <a:solidFill>
+                  <a:srgbClr val="FF0000"/>
+                </a:solidFill>
+              </a:rPr>
+              <a:t>use(</a:t>
+            </a:r>
+            <a:r>
+              <a:rPr lang="en-US" altLang="ko-KR" dirty="0" err="1">
+                <a:solidFill>
+                  <a:srgbClr val="FF0000"/>
+                </a:solidFill>
+              </a:rPr>
+              <a:t>vuetify</a:t>
+            </a:r>
+            <a:r>
+              <a:rPr lang="en-US" altLang="ko-KR" dirty="0">
+                <a:solidFill>
+                  <a:srgbClr val="FF0000"/>
+                </a:solidFill>
+              </a:rPr>
+              <a:t>)</a:t>
+            </a:r>
             <a:r>
               <a:rPr lang="en-US" altLang="ko-KR" dirty="0"/>
-              <a:t>Prettier : </a:t>
-            </a:r>
-            <a:r>
-              <a:rPr lang="ko-KR" altLang="en-US" dirty="0"/>
-              <a:t>코드 </a:t>
-            </a:r>
-            <a:r>
-              <a:rPr lang="ko-KR" altLang="en-US" dirty="0" err="1"/>
-              <a:t>포멧터로써</a:t>
-            </a:r>
-            <a:r>
-              <a:rPr lang="ko-KR" altLang="en-US" dirty="0"/>
-              <a:t> 코드를 </a:t>
-            </a:r>
-            <a:r>
-              <a:rPr lang="ko-KR" altLang="en-US" dirty="0" err="1"/>
-              <a:t>일관성있고</a:t>
-            </a:r>
-            <a:r>
-              <a:rPr lang="ko-KR" altLang="en-US" dirty="0"/>
-              <a:t> 예쁘게 작성할 수 있도록 도와주는 도구</a:t>
-            </a:r>
-            <a:endParaRPr lang="en-US" altLang="ko-KR" dirty="0"/>
-          </a:p>
-          <a:p>
+              <a:t>.mount('#app’)</a:t>
+            </a:r>
+          </a:p>
+          <a:p>
+            <a:pPr marL="0" indent="0">
+              <a:buNone/>
+            </a:pPr>
             <a:r>
               <a:rPr lang="en-US" altLang="ko-KR" dirty="0"/>
-              <a:t>Vue-Official : </a:t>
-            </a:r>
-            <a:r>
-              <a:rPr lang="ko-KR" altLang="en-US" dirty="0"/>
-              <a:t>언어지원 플러그인</a:t>
-            </a:r>
-            <a:endParaRPr lang="en-US" altLang="ko-KR" dirty="0"/>
-          </a:p>
-          <a:p>
-            <a:r>
-              <a:rPr lang="en-US" altLang="ko-KR" dirty="0"/>
-              <a:t>Vue </a:t>
-            </a:r>
-            <a:r>
-              <a:rPr lang="en-US" altLang="ko-KR" dirty="0" err="1"/>
-              <a:t>VSCode</a:t>
-            </a:r>
-            <a:r>
-              <a:rPr lang="en-US" altLang="ko-KR" dirty="0"/>
-              <a:t> Snippets</a:t>
-            </a:r>
-          </a:p>
-          <a:p>
-            <a:r>
-              <a:rPr lang="en-US" altLang="ko-KR" dirty="0"/>
-              <a:t>CSS Peek : HTML </a:t>
-            </a:r>
-            <a:r>
-              <a:rPr lang="ko-KR" altLang="en-US" dirty="0"/>
-              <a:t>문서에서 정의된 </a:t>
-            </a:r>
-            <a:r>
-              <a:rPr lang="en-US" altLang="ko-KR" dirty="0"/>
-              <a:t>CSS</a:t>
-            </a:r>
-            <a:r>
-              <a:rPr lang="ko-KR" altLang="en-US" dirty="0"/>
-              <a:t>를 금방 찾을 수 있도록 </a:t>
-            </a:r>
-            <a:r>
-              <a:rPr lang="ko-KR" altLang="en-US" dirty="0" err="1"/>
-              <a:t>도와줌</a:t>
-            </a:r>
-            <a:r>
-              <a:rPr lang="en-US" altLang="ko-KR" dirty="0"/>
-              <a:t>. Ctrl + </a:t>
-            </a:r>
-            <a:r>
-              <a:rPr lang="ko-KR" altLang="en-US" dirty="0"/>
-              <a:t>클릭 하면 선언된 곳으로 이동함</a:t>
-            </a:r>
-            <a:r>
-              <a:rPr lang="en-US" altLang="ko-KR" dirty="0"/>
-              <a:t>.</a:t>
+              <a:t>}</a:t>
             </a:r>
             <a:endParaRPr lang="ko-KR" altLang="en-US" dirty="0"/>
           </a:p>
@@ -3829,7 +4145,7 @@
     </p:spTree>
     <p:extLst>
       <p:ext uri="{BB962C8B-B14F-4D97-AF65-F5344CB8AC3E}">
-        <p14:creationId xmlns:p14="http://schemas.microsoft.com/office/powerpoint/2010/main" val="892059215"/>
+        <p14:creationId xmlns:p14="http://schemas.microsoft.com/office/powerpoint/2010/main" val="2341051213"/>
       </p:ext>
     </p:extLst>
   </p:cSld>

--- a/doc/개발환경_설치매뉴얼(Vuetify.JS).pptx
+++ b/doc/개발환경_설치매뉴얼(Vuetify.JS).pptx
@@ -8,6 +8,7 @@
     <p:sldId id="256" r:id="rId2"/>
     <p:sldId id="277" r:id="rId3"/>
     <p:sldId id="278" r:id="rId4"/>
+    <p:sldId id="279" r:id="rId5"/>
   </p:sldIdLst>
   <p:sldSz cx="12192000" cy="6858000"/>
   <p:notesSz cx="6858000" cy="9144000"/>
@@ -114,6 +115,7 @@
             <p14:sldId id="256"/>
             <p14:sldId id="277"/>
             <p14:sldId id="278"/>
+            <p14:sldId id="279"/>
           </p14:sldIdLst>
         </p14:section>
       </p14:sectionLst>
@@ -3519,7 +3521,15 @@
             </a:r>
             <a:r>
               <a:rPr lang="en-US" altLang="ko-KR" dirty="0"/>
-              <a:t> install @mdi/font</a:t>
+              <a:t> </a:t>
+            </a:r>
+            <a:r>
+              <a:rPr lang="en-US" altLang="ko-KR"/>
+              <a:t>install –D @</a:t>
+            </a:r>
+            <a:r>
+              <a:rPr lang="en-US" altLang="ko-KR" dirty="0"/>
+              <a:t>mdi/font</a:t>
             </a:r>
           </a:p>
           <a:p>
@@ -4146,6 +4156,90 @@
     <p:extLst>
       <p:ext uri="{BB962C8B-B14F-4D97-AF65-F5344CB8AC3E}">
         <p14:creationId xmlns:p14="http://schemas.microsoft.com/office/powerpoint/2010/main" val="2341051213"/>
+      </p:ext>
+    </p:extLst>
+  </p:cSld>
+  <p:clrMapOvr>
+    <a:masterClrMapping/>
+  </p:clrMapOvr>
+</p:sld>
+</file>
+
+<file path=ppt/slides/slide4.xml><?xml version="1.0" encoding="utf-8"?>
+<p:sld xmlns:a="http://schemas.openxmlformats.org/drawingml/2006/main" xmlns:r="http://schemas.openxmlformats.org/officeDocument/2006/relationships" xmlns:p="http://schemas.openxmlformats.org/presentationml/2006/main">
+  <p:cSld>
+    <p:spTree>
+      <p:nvGrpSpPr>
+        <p:cNvPr id="1" name=""/>
+        <p:cNvGrpSpPr/>
+        <p:nvPr/>
+      </p:nvGrpSpPr>
+      <p:grpSpPr>
+        <a:xfrm>
+          <a:off x="0" y="0"/>
+          <a:ext cx="0" cy="0"/>
+          <a:chOff x="0" y="0"/>
+          <a:chExt cx="0" cy="0"/>
+        </a:xfrm>
+      </p:grpSpPr>
+      <p:sp>
+        <p:nvSpPr>
+          <p:cNvPr id="2" name="제목 1">
+            <a:extLst>
+              <a:ext uri="{FF2B5EF4-FFF2-40B4-BE49-F238E27FC236}">
+                <a16:creationId xmlns:a16="http://schemas.microsoft.com/office/drawing/2014/main" id="{E1E89E55-0401-C1B0-E780-78841BBA8CF8}"/>
+              </a:ext>
+            </a:extLst>
+          </p:cNvPr>
+          <p:cNvSpPr>
+            <a:spLocks noGrp="1"/>
+          </p:cNvSpPr>
+          <p:nvPr>
+            <p:ph type="title"/>
+          </p:nvPr>
+        </p:nvSpPr>
+        <p:spPr/>
+        <p:txBody>
+          <a:bodyPr/>
+          <a:lstStyle/>
+          <a:p>
+            <a:r>
+              <a:rPr lang="en-US" altLang="ko-KR" dirty="0"/>
+              <a:t>Theme</a:t>
+            </a:r>
+            <a:endParaRPr lang="ko-KR" altLang="en-US" dirty="0"/>
+          </a:p>
+        </p:txBody>
+      </p:sp>
+      <p:sp>
+        <p:nvSpPr>
+          <p:cNvPr id="3" name="내용 개체 틀 2">
+            <a:extLst>
+              <a:ext uri="{FF2B5EF4-FFF2-40B4-BE49-F238E27FC236}">
+                <a16:creationId xmlns:a16="http://schemas.microsoft.com/office/drawing/2014/main" id="{210C0C31-BAB1-5D24-F10D-BBB98BB86522}"/>
+              </a:ext>
+            </a:extLst>
+          </p:cNvPr>
+          <p:cNvSpPr>
+            <a:spLocks noGrp="1"/>
+          </p:cNvSpPr>
+          <p:nvPr>
+            <p:ph idx="1"/>
+          </p:nvPr>
+        </p:nvSpPr>
+        <p:spPr/>
+        <p:txBody>
+          <a:bodyPr/>
+          <a:lstStyle/>
+          <a:p>
+            <a:endParaRPr lang="ko-KR" altLang="en-US" dirty="0"/>
+          </a:p>
+        </p:txBody>
+      </p:sp>
+    </p:spTree>
+    <p:extLst>
+      <p:ext uri="{BB962C8B-B14F-4D97-AF65-F5344CB8AC3E}">
+        <p14:creationId xmlns:p14="http://schemas.microsoft.com/office/powerpoint/2010/main" val="3855414478"/>
       </p:ext>
     </p:extLst>
   </p:cSld>

--- a/doc/개발환경_설치매뉴얼(Vuetify.JS).pptx
+++ b/doc/개발환경_설치매뉴얼(Vuetify.JS).pptx
@@ -274,7 +274,7 @@
           <a:p>
             <a:fld id="{7359EE32-49FD-4EA7-9011-353EB936649F}" type="datetimeFigureOut">
               <a:rPr lang="ko-KR" altLang="en-US" smtClean="0"/>
-              <a:t>2025-09-07</a:t>
+              <a:t>2025-09-08</a:t>
             </a:fld>
             <a:endParaRPr lang="ko-KR" altLang="en-US"/>
           </a:p>
@@ -472,7 +472,7 @@
           <a:p>
             <a:fld id="{7359EE32-49FD-4EA7-9011-353EB936649F}" type="datetimeFigureOut">
               <a:rPr lang="ko-KR" altLang="en-US" smtClean="0"/>
-              <a:t>2025-09-07</a:t>
+              <a:t>2025-09-08</a:t>
             </a:fld>
             <a:endParaRPr lang="ko-KR" altLang="en-US"/>
           </a:p>
@@ -680,7 +680,7 @@
           <a:p>
             <a:fld id="{7359EE32-49FD-4EA7-9011-353EB936649F}" type="datetimeFigureOut">
               <a:rPr lang="ko-KR" altLang="en-US" smtClean="0"/>
-              <a:t>2025-09-07</a:t>
+              <a:t>2025-09-08</a:t>
             </a:fld>
             <a:endParaRPr lang="ko-KR" altLang="en-US"/>
           </a:p>
@@ -878,7 +878,7 @@
           <a:p>
             <a:fld id="{7359EE32-49FD-4EA7-9011-353EB936649F}" type="datetimeFigureOut">
               <a:rPr lang="ko-KR" altLang="en-US" smtClean="0"/>
-              <a:t>2025-09-07</a:t>
+              <a:t>2025-09-08</a:t>
             </a:fld>
             <a:endParaRPr lang="ko-KR" altLang="en-US"/>
           </a:p>
@@ -1153,7 +1153,7 @@
           <a:p>
             <a:fld id="{7359EE32-49FD-4EA7-9011-353EB936649F}" type="datetimeFigureOut">
               <a:rPr lang="ko-KR" altLang="en-US" smtClean="0"/>
-              <a:t>2025-09-07</a:t>
+              <a:t>2025-09-08</a:t>
             </a:fld>
             <a:endParaRPr lang="ko-KR" altLang="en-US"/>
           </a:p>
@@ -1418,7 +1418,7 @@
           <a:p>
             <a:fld id="{7359EE32-49FD-4EA7-9011-353EB936649F}" type="datetimeFigureOut">
               <a:rPr lang="ko-KR" altLang="en-US" smtClean="0"/>
-              <a:t>2025-09-07</a:t>
+              <a:t>2025-09-08</a:t>
             </a:fld>
             <a:endParaRPr lang="ko-KR" altLang="en-US"/>
           </a:p>
@@ -1830,7 +1830,7 @@
           <a:p>
             <a:fld id="{7359EE32-49FD-4EA7-9011-353EB936649F}" type="datetimeFigureOut">
               <a:rPr lang="ko-KR" altLang="en-US" smtClean="0"/>
-              <a:t>2025-09-07</a:t>
+              <a:t>2025-09-08</a:t>
             </a:fld>
             <a:endParaRPr lang="ko-KR" altLang="en-US"/>
           </a:p>
@@ -1971,7 +1971,7 @@
           <a:p>
             <a:fld id="{7359EE32-49FD-4EA7-9011-353EB936649F}" type="datetimeFigureOut">
               <a:rPr lang="ko-KR" altLang="en-US" smtClean="0"/>
-              <a:t>2025-09-07</a:t>
+              <a:t>2025-09-08</a:t>
             </a:fld>
             <a:endParaRPr lang="ko-KR" altLang="en-US"/>
           </a:p>
@@ -2084,7 +2084,7 @@
           <a:p>
             <a:fld id="{7359EE32-49FD-4EA7-9011-353EB936649F}" type="datetimeFigureOut">
               <a:rPr lang="ko-KR" altLang="en-US" smtClean="0"/>
-              <a:t>2025-09-07</a:t>
+              <a:t>2025-09-08</a:t>
             </a:fld>
             <a:endParaRPr lang="ko-KR" altLang="en-US"/>
           </a:p>
@@ -2395,7 +2395,7 @@
           <a:p>
             <a:fld id="{7359EE32-49FD-4EA7-9011-353EB936649F}" type="datetimeFigureOut">
               <a:rPr lang="ko-KR" altLang="en-US" smtClean="0"/>
-              <a:t>2025-09-07</a:t>
+              <a:t>2025-09-08</a:t>
             </a:fld>
             <a:endParaRPr lang="ko-KR" altLang="en-US"/>
           </a:p>
@@ -2683,7 +2683,7 @@
           <a:p>
             <a:fld id="{7359EE32-49FD-4EA7-9011-353EB936649F}" type="datetimeFigureOut">
               <a:rPr lang="ko-KR" altLang="en-US" smtClean="0"/>
-              <a:t>2025-09-07</a:t>
+              <a:t>2025-09-08</a:t>
             </a:fld>
             <a:endParaRPr lang="ko-KR" altLang="en-US"/>
           </a:p>
@@ -2924,7 +2924,7 @@
           <a:p>
             <a:fld id="{7359EE32-49FD-4EA7-9011-353EB936649F}" type="datetimeFigureOut">
               <a:rPr lang="ko-KR" altLang="en-US" smtClean="0"/>
-              <a:t>2025-09-07</a:t>
+              <a:t>2025-09-08</a:t>
             </a:fld>
             <a:endParaRPr lang="ko-KR" altLang="en-US"/>
           </a:p>
@@ -3866,7 +3866,7 @@
                   <a:srgbClr val="0070C0"/>
                 </a:solidFill>
               </a:rPr>
-              <a:t>/styles’</a:t>
+              <a:t>/styles'</a:t>
             </a:r>
             <a:br>
               <a:rPr lang="en-US" altLang="ko-KR" dirty="0">
@@ -3881,13 +3881,32 @@
                   <a:srgbClr val="0070C0"/>
                 </a:solidFill>
               </a:rPr>
-              <a:t>import ‘@mdi/font/css/materialdesignicons.css’</a:t>
-            </a:r>
-            <a:endParaRPr lang="en-US" altLang="ko-KR" dirty="0">
-              <a:solidFill>
-                <a:srgbClr val="0070C0"/>
-              </a:solidFill>
-            </a:endParaRPr>
+              <a:t>import </a:t>
+            </a:r>
+            <a:r>
+              <a:rPr lang="en-US" altLang="ko-KR" dirty="0">
+                <a:solidFill>
+                  <a:srgbClr val="0070C0"/>
+                </a:solidFill>
+              </a:rPr>
+              <a:t>'</a:t>
+            </a:r>
+            <a:r>
+              <a:rPr lang="fr-FR" altLang="ko-KR" dirty="0">
+                <a:solidFill>
+                  <a:srgbClr val="0070C0"/>
+                </a:solidFill>
+              </a:rPr>
+              <a:t>@mdi/font/css/materialdesignicons.css</a:t>
+            </a:r>
+            <a:r>
+              <a:rPr lang="en-US" altLang="ko-KR" dirty="0">
+                <a:solidFill>
+                  <a:srgbClr val="0070C0"/>
+                </a:solidFill>
+              </a:rPr>
+              <a:t>'</a:t>
+            </a:r>
           </a:p>
           <a:p>
             <a:pPr marL="457200" lvl="1" indent="0">
